--- a/docs/Daneben_1Min_Sales_Pitch_DE.pptx
+++ b/docs/Daneben_1Min_Sales_Pitch_DE.pptx
@@ -13,6 +13,7 @@
     <p:sldId id="261" r:id="rId13"/>
     <p:sldId id="262" r:id="rId14"/>
     <p:sldId id="263" r:id="rId15"/>
+    <p:sldId id="264" r:id="rId16"/>
   </p:sldIdLst>
   <p:sldSz cx="12191695" cy="6858000" type="screen4x3"/>
   <p:notesSz cx="6858000" cy="9144000"/>
@@ -514,7 +515,7 @@
           </a:p>
           <a:p>
             <a:r>
-              <a:t>"Jede Stadt leidet unter Müllbergen neben öffentlichen Abfalleimern. Wir sind das Team der Hochschule Niederrhein und haben 'Daneben!' entwickelt – das erste solarbetriebene Edge-AI Nachrüstmodul, das wilde Müllablagerungen in Echtzeit erkennt, den internen Füllstand prüft und aktiv interveniert, bevor die Person weitergeht."</a:t>
+              <a:t>"Jede Stadt leidet unter Müllbergen neben öffentlichen Abfalleimern. Wir sind das Team der Hochschule Niederrhein – Chukwuekwugo Egbuonu, Hilary Mubwandarikwa und Ala Temimi – und haben 'Daneben!' entwickelt – das erste solarbetriebene Edge-AI Nachrüstmodul, das wilde Müllablagerungen in Echtzeit erkennt, den internen Füllstand prüft und aktiv interveniert, bevor die Person weitergeht."</a:t>
             </a:r>
           </a:p>
         </p:txBody>
@@ -1040,6 +1041,81 @@
           <a:p>
             <a:r>
               <a:t>"Mit nur 27 Euro Fertigungskosten und 4 Euro monatlicher Softwarelizenz erzielen wir pro Stadt 240.000 Euro wiederkehrenden Jahresumsatz. Unser Prototyp, die Firmware und das IP67-CAD-Gehäuse sind einsatzbereit. Starten Sie mit uns das 50-Behälter-Pilotprojekt – denn Müll gehört in den Eimer, niemals 'Daneben!' Vielen Dank."</a:t>
+            </a:r>
+          </a:p>
+        </p:txBody>
+      </p:sp>
+      <p:sp>
+        <p:nvSpPr>
+          <p:cNvPr id="4" name="Slide Number Placeholder 3"/>
+          <p:cNvSpPr>
+            <a:spLocks noGrp="1"/>
+          </p:cNvSpPr>
+          <p:nvPr>
+            <p:ph type="sldNum" idx="5" sz="quarter"/>
+          </p:nvPr>
+        </p:nvSpPr>
+        <p:spPr/>
+      </p:sp>
+    </p:spTree>
+  </p:cSld>
+  <p:clrMapOvr>
+    <a:masterClrMapping/>
+  </p:clrMapOvr>
+</p:notes>
+</file>
+
+<file path=ppt/notesSlides/notesSlide9.xml><?xml version="1.0" encoding="utf-8"?>
+<p:notes xmlns:a="http://schemas.openxmlformats.org/drawingml/2006/main" xmlns:p="http://schemas.openxmlformats.org/presentationml/2006/main" xmlns:r="http://schemas.openxmlformats.org/officeDocument/2006/relationships">
+  <p:cSld>
+    <p:spTree>
+      <p:nvGrpSpPr>
+        <p:cNvPr id="1" name=""/>
+        <p:cNvGrpSpPr/>
+        <p:nvPr/>
+      </p:nvGrpSpPr>
+      <p:grpSpPr>
+        <a:xfrm>
+          <a:off x="0" y="0"/>
+          <a:ext cx="0" cy="0"/>
+          <a:chOff x="0" y="0"/>
+          <a:chExt cx="0" cy="0"/>
+        </a:xfrm>
+      </p:grpSpPr>
+      <p:sp>
+        <p:nvSpPr>
+          <p:cNvPr id="2" name="Slide Image Placeholder 1"/>
+          <p:cNvSpPr>
+            <a:spLocks noGrp="1"/>
+          </p:cNvSpPr>
+          <p:nvPr>
+            <p:ph type="sldImg" idx="2"/>
+          </p:nvPr>
+        </p:nvSpPr>
+        <p:spPr/>
+      </p:sp>
+      <p:sp>
+        <p:nvSpPr>
+          <p:cNvPr id="3" name="Notes Placeholder 2"/>
+          <p:cNvSpPr>
+            <a:spLocks noGrp="1"/>
+          </p:cNvSpPr>
+          <p:nvPr>
+            <p:ph type="body" idx="3" sz="quarter"/>
+          </p:nvPr>
+        </p:nvSpPr>
+        <p:spPr/>
+        <p:txBody>
+          <a:bodyPr/>
+          <a:lstStyle/>
+          <a:p>
+            <a:r>
+              <a:t>[Fazit &amp; Fragen]</a:t>
+            </a:r>
+          </a:p>
+          <a:p>
+            <a:r>
+              <a:t>"Vielen Dank für Ihre Aufmerksamkeit und fürs Zuhören! Unsere Vision mit Daneben! ist klar: Halten wir unsere Stadt gemeinsam sauber! Durch die Verbindung aus akustischem Vor-Ort-Nudging, datenschutzkonformer Edge-KI und intelligenter Flottensteuerung lösen wir das Beistellmüll-Problem an der Wurzel. Wir freuen uns nun auf Ihre Fragen und die Diskussion zu unserem NRW-Pilotprojekt."</a:t>
             </a:r>
           </a:p>
         </p:txBody>
@@ -4150,7 +4226,7 @@
         <p:spPr>
           <a:xfrm>
             <a:off x="731520" y="4114800"/>
-            <a:ext cx="6035040" cy="1737360"/>
+            <a:ext cx="6263640" cy="1737360"/>
           </a:xfrm>
           <a:prstGeom prst="roundRect">
             <a:avLst/>
@@ -4199,7 +4275,7 @@
               <a:spcBef>
                 <a:spcPts val="400"/>
               </a:spcBef>
-              <a:defRPr sz="1300" b="1">
+              <a:defRPr sz="1200" b="1">
                 <a:solidFill>
                   <a:srgbClr val="0F172A"/>
                 </a:solidFill>
@@ -4207,7 +4283,7 @@
               </a:defRPr>
             </a:pPr>
             <a:r>
-              <a:t>Projektleitung: [Ihr Name]   |   Team: [Mitglied 2], [Mitglied 3]</a:t>
+              <a:t>Projektleitung: Chukwuekwugo Egbuonu   |   Team: Hilary Mubwandarikwa, Ala Temimi</a:t>
             </a:r>
           </a:p>
           <a:p>
@@ -4296,7 +4372,7 @@
               </a:defRPr>
             </a:pPr>
             <a:r>
-              <a:t>DANEBEN!  |  Produktions-Präsentation &amp; Sales Pitch (Standard-Edition)  |  Folie 1 von 8</a:t>
+              <a:t>DANEBEN!  |  Produktions-Präsentation &amp; Sales Pitch (Standard-Edition)  |  Folie 1 von 9</a:t>
             </a:r>
           </a:p>
         </p:txBody>
@@ -4655,7 +4731,7 @@
               </a:defRPr>
             </a:pPr>
             <a:r>
-              <a:t>DANEBEN!  |  Produktions-Präsentation &amp; Sales Pitch (Standard-Edition)  |  Folie 2 von 8</a:t>
+              <a:t>DANEBEN!  |  Produktions-Präsentation &amp; Sales Pitch (Standard-Edition)  |  Folie 2 von 9</a:t>
             </a:r>
           </a:p>
         </p:txBody>
@@ -5014,7 +5090,7 @@
               </a:defRPr>
             </a:pPr>
             <a:r>
-              <a:t>DANEBEN!  |  Produktions-Präsentation &amp; Sales Pitch (Standard-Edition)  |  Folie 3 von 8</a:t>
+              <a:t>DANEBEN!  |  Produktions-Präsentation &amp; Sales Pitch (Standard-Edition)  |  Folie 3 von 9</a:t>
             </a:r>
           </a:p>
         </p:txBody>
@@ -5389,7 +5465,7 @@
               </a:defRPr>
             </a:pPr>
             <a:r>
-              <a:t>DANEBEN!  |  Produktions-Präsentation &amp; Sales Pitch (Standard-Edition)  |  Folie 4 von 8</a:t>
+              <a:t>DANEBEN!  |  Produktions-Präsentation &amp; Sales Pitch (Standard-Edition)  |  Folie 4 von 9</a:t>
             </a:r>
           </a:p>
         </p:txBody>
@@ -5983,7 +6059,7 @@
               </a:defRPr>
             </a:pPr>
             <a:r>
-              <a:t>DANEBEN!  |  Produktions-Präsentation &amp; Sales Pitch (Standard-Edition)  |  Folie 5 von 8</a:t>
+              <a:t>DANEBEN!  |  Produktions-Präsentation &amp; Sales Pitch (Standard-Edition)  |  Folie 5 von 9</a:t>
             </a:r>
           </a:p>
         </p:txBody>
@@ -7253,7 +7329,7 @@
               </a:defRPr>
             </a:pPr>
             <a:r>
-              <a:t>DANEBEN!  |  Produktions-Präsentation &amp; Sales Pitch (Standard-Edition)  |  Folie 6 von 8</a:t>
+              <a:t>DANEBEN!  |  Produktions-Präsentation &amp; Sales Pitch (Standard-Edition)  |  Folie 6 von 9</a:t>
             </a:r>
           </a:p>
         </p:txBody>
@@ -7853,7 +7929,7 @@
               </a:defRPr>
             </a:pPr>
             <a:r>
-              <a:t>DANEBEN!  |  Produktions-Präsentation &amp; Sales Pitch (Standard-Edition)  |  Folie 7 von 8</a:t>
+              <a:t>DANEBEN!  |  Produktions-Präsentation &amp; Sales Pitch (Standard-Edition)  |  Folie 7 von 9</a:t>
             </a:r>
           </a:p>
         </p:txBody>
@@ -8302,7 +8378,559 @@
               </a:defRPr>
             </a:pPr>
             <a:r>
-              <a:t>DANEBEN!  |  Produktions-Präsentation &amp; Sales Pitch (Standard-Edition)  |  Folie 8 von 8</a:t>
+              <a:t>DANEBEN!  |  Produktions-Präsentation &amp; Sales Pitch (Standard-Edition)  |  Folie 8 von 9</a:t>
+            </a:r>
+          </a:p>
+        </p:txBody>
+      </p:sp>
+    </p:spTree>
+  </p:cSld>
+  <p:clrMapOvr>
+    <a:masterClrMapping/>
+  </p:clrMapOvr>
+</p:sld>
+</file>
+
+<file path=ppt/slides/slide9.xml><?xml version="1.0" encoding="utf-8"?>
+<p:sld xmlns:a="http://schemas.openxmlformats.org/drawingml/2006/main" xmlns:p="http://schemas.openxmlformats.org/presentationml/2006/main" xmlns:r="http://schemas.openxmlformats.org/officeDocument/2006/relationships">
+  <p:cSld>
+    <p:bg>
+      <p:bgPr>
+        <a:solidFill>
+          <a:srgbClr val="FFFFFF"/>
+        </a:solidFill>
+        <a:effectLst/>
+      </p:bgPr>
+    </p:bg>
+    <p:spTree>
+      <p:nvGrpSpPr>
+        <p:cNvPr id="1" name=""/>
+        <p:cNvGrpSpPr/>
+        <p:nvPr/>
+      </p:nvGrpSpPr>
+      <p:grpSpPr/>
+      <p:sp>
+        <p:nvSpPr>
+          <p:cNvPr id="2" name="Rounded Rectangle 1"/>
+          <p:cNvSpPr/>
+          <p:nvPr/>
+        </p:nvSpPr>
+        <p:spPr>
+          <a:xfrm>
+            <a:off x="731520" y="438912"/>
+            <a:ext cx="3474720" cy="347472"/>
+          </a:xfrm>
+          <a:prstGeom prst="roundRect">
+            <a:avLst/>
+          </a:prstGeom>
+          <a:solidFill>
+            <a:srgbClr val="F8FAFC"/>
+          </a:solidFill>
+          <a:ln w="19050">
+            <a:solidFill>
+              <a:srgbClr val="10B981"/>
+            </a:solidFill>
+          </a:ln>
+        </p:spPr>
+        <p:style>
+          <a:lnRef idx="1">
+            <a:schemeClr val="accent1"/>
+          </a:lnRef>
+          <a:fillRef idx="3">
+            <a:schemeClr val="accent1"/>
+          </a:fillRef>
+          <a:effectRef idx="2">
+            <a:schemeClr val="accent1"/>
+          </a:effectRef>
+          <a:fontRef idx="minor">
+            <a:schemeClr val="lt1"/>
+          </a:fontRef>
+        </p:style>
+        <p:txBody>
+          <a:bodyPr rtlCol="0" anchor="ctr" wrap="none"/>
+          <a:lstStyle/>
+          <a:p>
+            <a:pPr algn="ctr">
+              <a:defRPr sz="1100" b="1">
+                <a:solidFill>
+                  <a:srgbClr val="10B981"/>
+                </a:solidFill>
+                <a:latin typeface="Segoe UI"/>
+              </a:defRPr>
+            </a:pPr>
+            <a:r>
+              <a:t>VIELEN DANK &amp; FRAGEN  |  Q&amp;A</a:t>
+            </a:r>
+          </a:p>
+        </p:txBody>
+      </p:sp>
+      <p:sp>
+        <p:nvSpPr>
+          <p:cNvPr id="3" name="TextBox 2"/>
+          <p:cNvSpPr txBox="1"/>
+          <p:nvPr/>
+        </p:nvSpPr>
+        <p:spPr>
+          <a:xfrm>
+            <a:off x="731520" y="868680"/>
+            <a:ext cx="10698480" cy="658368"/>
+          </a:xfrm>
+          <a:prstGeom prst="rect">
+            <a:avLst/>
+          </a:prstGeom>
+          <a:noFill/>
+        </p:spPr>
+        <p:txBody>
+          <a:bodyPr wrap="square">
+            <a:spAutoFit/>
+          </a:bodyPr>
+          <a:lstStyle/>
+          <a:p>
+            <a:pPr>
+              <a:defRPr sz="2300" b="1">
+                <a:solidFill>
+                  <a:srgbClr val="0F172A"/>
+                </a:solidFill>
+                <a:latin typeface="Segoe UI"/>
+              </a:defRPr>
+            </a:pPr>
+            <a:r>
+              <a:t>Vielen Dank für Ihre Aufmerksamkeit! Halten wir unsere Stadt sauber.</a:t>
+            </a:r>
+          </a:p>
+        </p:txBody>
+      </p:sp>
+      <p:sp>
+        <p:nvSpPr>
+          <p:cNvPr id="4" name="Rounded Rectangle 3"/>
+          <p:cNvSpPr/>
+          <p:nvPr/>
+        </p:nvSpPr>
+        <p:spPr>
+          <a:xfrm>
+            <a:off x="731520" y="1691640"/>
+            <a:ext cx="5120640" cy="4480560"/>
+          </a:xfrm>
+          <a:prstGeom prst="roundRect">
+            <a:avLst/>
+          </a:prstGeom>
+          <a:solidFill>
+            <a:srgbClr val="F8FAFC"/>
+          </a:solidFill>
+          <a:ln w="19050">
+            <a:solidFill>
+              <a:srgbClr val="10B981"/>
+            </a:solidFill>
+          </a:ln>
+        </p:spPr>
+        <p:style>
+          <a:lnRef idx="1">
+            <a:schemeClr val="accent1"/>
+          </a:lnRef>
+          <a:fillRef idx="3">
+            <a:schemeClr val="accent1"/>
+          </a:fillRef>
+          <a:effectRef idx="2">
+            <a:schemeClr val="accent1"/>
+          </a:effectRef>
+          <a:fontRef idx="minor">
+            <a:schemeClr val="lt1"/>
+          </a:fontRef>
+        </p:style>
+        <p:txBody>
+          <a:bodyPr rtlCol="0" anchor="ctr" wrap="square"/>
+          <a:lstStyle/>
+          <a:p>
+            <a:pPr algn="ctr">
+              <a:defRPr sz="1100" b="1">
+                <a:solidFill>
+                  <a:srgbClr val="10B981"/>
+                </a:solidFill>
+                <a:latin typeface="Segoe UI"/>
+              </a:defRPr>
+            </a:pPr>
+            <a:r>
+              <a:t>🌱 UNSERE GEMEINSAME MISSION</a:t>
+            </a:r>
+          </a:p>
+          <a:p>
+            <a:pPr>
+              <a:spcBef>
+                <a:spcPts val="400"/>
+              </a:spcBef>
+              <a:defRPr sz="2600" b="1">
+                <a:solidFill>
+                  <a:srgbClr val="0F172A"/>
+                </a:solidFill>
+                <a:latin typeface="Segoe UI"/>
+              </a:defRPr>
+            </a:pPr>
+            <a:r>
+              <a:t>„Halten wir unsere Stadt sauber!“</a:t>
+            </a:r>
+          </a:p>
+          <a:p>
+            <a:pPr>
+              <a:spcBef>
+                <a:spcPts val="400"/>
+              </a:spcBef>
+              <a:defRPr sz="1350" b="1">
+                <a:solidFill>
+                  <a:srgbClr val="10B981"/>
+                </a:solidFill>
+                <a:latin typeface="Segoe UI"/>
+              </a:defRPr>
+            </a:pPr>
+            <a:r>
+              <a:t>Müll gehört in den Eimer – niemals „Daneben!“</a:t>
+            </a:r>
+          </a:p>
+          <a:p>
+            <a:pPr>
+              <a:spcBef>
+                <a:spcPts val="600"/>
+              </a:spcBef>
+            </a:pPr>
+            <a:r>
+              <a:rPr sz="1150" b="1">
+                <a:solidFill>
+                  <a:srgbClr val="0F172A"/>
+                </a:solidFill>
+                <a:latin typeface="Segoe UI"/>
+              </a:rPr>
+              <a:t>• Aktives Bürger-Nudging:</a:t>
+            </a:r>
+            <a:r>
+              <a:rPr sz="1150">
+                <a:solidFill>
+                  <a:srgbClr val="64748B"/>
+                </a:solidFill>
+                <a:latin typeface="Segoe UI"/>
+              </a:rPr>
+              <a:t> Akustischer Sprachhinweis motiviert direkt vor Ort, bevor Beistellmüll entsteht.</a:t>
+            </a:r>
+          </a:p>
+          <a:p>
+            <a:pPr>
+              <a:spcBef>
+                <a:spcPts val="600"/>
+              </a:spcBef>
+            </a:pPr>
+            <a:r>
+              <a:rPr sz="1150" b="1">
+                <a:solidFill>
+                  <a:srgbClr val="0F172A"/>
+                </a:solidFill>
+                <a:latin typeface="Segoe UI"/>
+              </a:rPr>
+              <a:t>• 100% DSGVO-konform:</a:t>
+            </a:r>
+            <a:r>
+              <a:rPr sz="1150">
+                <a:solidFill>
+                  <a:srgbClr val="64748B"/>
+                </a:solidFill>
+                <a:latin typeface="Segoe UI"/>
+              </a:rPr>
+              <a:t> Reine lokale Edge-KI-Erkennung, keine Personenüberwachung im öffentlichen Raum.</a:t>
+            </a:r>
+          </a:p>
+          <a:p>
+            <a:pPr>
+              <a:spcBef>
+                <a:spcPts val="600"/>
+              </a:spcBef>
+            </a:pPr>
+            <a:r>
+              <a:rPr sz="1150" b="1">
+                <a:solidFill>
+                  <a:srgbClr val="0F172A"/>
+                </a:solidFill>
+                <a:latin typeface="Segoe UI"/>
+              </a:rPr>
+              <a:t>• Smarte Flottenlogistik:</a:t>
+            </a:r>
+            <a:r>
+              <a:rPr sz="1150">
+                <a:solidFill>
+                  <a:srgbClr val="64748B"/>
+                </a:solidFill>
+                <a:latin typeface="Segoe UI"/>
+              </a:rPr>
+              <a:t> Bis zu 30% weniger Leerfahrten durch vorausschauende Füllstandstelemetrie.</a:t>
+            </a:r>
+          </a:p>
+          <a:p>
+            <a:pPr>
+              <a:spcBef>
+                <a:spcPts val="600"/>
+              </a:spcBef>
+            </a:pPr>
+            <a:r>
+              <a:rPr sz="1150" b="1">
+                <a:solidFill>
+                  <a:srgbClr val="0F172A"/>
+                </a:solidFill>
+                <a:latin typeface="Segoe UI"/>
+              </a:rPr>
+              <a:t>• Autark &amp; Nachrüstbar:</a:t>
+            </a:r>
+            <a:r>
+              <a:rPr sz="1150">
+                <a:solidFill>
+                  <a:srgbClr val="64748B"/>
+                </a:solidFill>
+                <a:latin typeface="Segoe UI"/>
+              </a:rPr>
+              <a:t> Wartungsfreier Solarbetrieb (IP67) für bestehende kommunale Abfallbehälter.</a:t>
+            </a:r>
+          </a:p>
+          <a:p>
+            <a:pPr>
+              <a:spcBef>
+                <a:spcPts val="1400"/>
+              </a:spcBef>
+              <a:defRPr sz="1050" b="1">
+                <a:solidFill>
+                  <a:srgbClr val="0F172A"/>
+                </a:solidFill>
+                <a:latin typeface="Segoe UI"/>
+              </a:defRPr>
+            </a:pPr>
+            <a:r>
+              <a:t>Hochschule Niederrhein (HSNR) · FB 03 Elektrotechnik &amp; Informatik</a:t>
+            </a:r>
+          </a:p>
+          <a:p>
+            <a:pPr>
+              <a:spcBef>
+                <a:spcPts val="200"/>
+              </a:spcBef>
+              <a:defRPr sz="950">
+                <a:solidFill>
+                  <a:srgbClr val="64748B"/>
+                </a:solidFill>
+                <a:latin typeface="Segoe UI"/>
+              </a:defRPr>
+            </a:pPr>
+            <a:r>
+              <a:t>Team: Chukwuekwugo Egbuonu (Lead), Hilary Mubwandarikwa, Ala Temimi</a:t>
+            </a:r>
+            <a:br/>
+            <a:r>
+              <a:t>Projekt: Daneben! · Modul: Mikrocontroller (5. Sem.) · Bereit für Kommunal-Piloten in NRW</a:t>
+            </a:r>
+          </a:p>
+        </p:txBody>
+      </p:sp>
+      <p:sp>
+        <p:nvSpPr>
+          <p:cNvPr id="5" name="Rounded Rectangle 4"/>
+          <p:cNvSpPr/>
+          <p:nvPr/>
+        </p:nvSpPr>
+        <p:spPr>
+          <a:xfrm>
+            <a:off x="6080760" y="1691640"/>
+            <a:ext cx="5349240" cy="4480560"/>
+          </a:xfrm>
+          <a:prstGeom prst="roundRect">
+            <a:avLst/>
+          </a:prstGeom>
+          <a:solidFill>
+            <a:srgbClr val="F8FAFC"/>
+          </a:solidFill>
+          <a:ln w="19050">
+            <a:solidFill>
+              <a:srgbClr val="E2E8F0"/>
+            </a:solidFill>
+          </a:ln>
+        </p:spPr>
+        <p:style>
+          <a:lnRef idx="1">
+            <a:schemeClr val="accent1"/>
+          </a:lnRef>
+          <a:fillRef idx="3">
+            <a:schemeClr val="accent1"/>
+          </a:fillRef>
+          <a:effectRef idx="2">
+            <a:schemeClr val="accent1"/>
+          </a:effectRef>
+          <a:fontRef idx="minor">
+            <a:schemeClr val="lt1"/>
+          </a:fontRef>
+        </p:style>
+        <p:txBody>
+          <a:bodyPr rtlCol="0" anchor="ctr"/>
+          <a:lstStyle/>
+          <a:p>
+            <a:pPr algn="ctr"/>
+          </a:p>
+        </p:txBody>
+      </p:sp>
+      <p:sp>
+        <p:nvSpPr>
+          <p:cNvPr id="6" name="TextBox 5"/>
+          <p:cNvSpPr txBox="1"/>
+          <p:nvPr/>
+        </p:nvSpPr>
+        <p:spPr>
+          <a:xfrm>
+            <a:off x="6263640" y="1783080"/>
+            <a:ext cx="4983480" cy="320040"/>
+          </a:xfrm>
+          <a:prstGeom prst="rect">
+            <a:avLst/>
+          </a:prstGeom>
+          <a:noFill/>
+        </p:spPr>
+        <p:txBody>
+          <a:bodyPr wrap="none">
+            <a:spAutoFit/>
+          </a:bodyPr>
+          <a:lstStyle/>
+          <a:p>
+            <a:pPr>
+              <a:defRPr sz="1350" b="1">
+                <a:solidFill>
+                  <a:srgbClr val="0F172A"/>
+                </a:solidFill>
+                <a:latin typeface="Segoe UI"/>
+              </a:defRPr>
+            </a:pPr>
+            <a:r>
+              <a:t>✨ Eine saubere Stadt durch intelligente Abfallbehälter</a:t>
+            </a:r>
+          </a:p>
+        </p:txBody>
+      </p:sp>
+      <p:pic>
+        <p:nvPicPr>
+          <p:cNvPr id="7" name="Picture 6" descr="clean_city_illustration_png_1792698653752.jpg"/>
+          <p:cNvPicPr>
+            <a:picLocks noChangeAspect="1"/>
+          </p:cNvPicPr>
+          <p:nvPr/>
+        </p:nvPicPr>
+        <p:blipFill>
+          <a:blip r:embed="rId2"/>
+          <a:stretch>
+            <a:fillRect/>
+          </a:stretch>
+        </p:blipFill>
+        <p:spPr>
+          <a:xfrm>
+            <a:off x="6263640" y="2176272"/>
+            <a:ext cx="4983480" cy="2781477"/>
+          </a:xfrm>
+          <a:prstGeom prst="rect">
+            <a:avLst/>
+          </a:prstGeom>
+        </p:spPr>
+      </p:pic>
+      <p:sp>
+        <p:nvSpPr>
+          <p:cNvPr id="8" name="Rounded Rectangle 7"/>
+          <p:cNvSpPr/>
+          <p:nvPr/>
+        </p:nvSpPr>
+        <p:spPr>
+          <a:xfrm>
+            <a:off x="6263640" y="5138928"/>
+            <a:ext cx="4983480" cy="841248"/>
+          </a:xfrm>
+          <a:prstGeom prst="roundRect">
+            <a:avLst/>
+          </a:prstGeom>
+          <a:solidFill>
+            <a:srgbClr val="FFFFFF"/>
+          </a:solidFill>
+          <a:ln w="15240">
+            <a:solidFill>
+              <a:srgbClr val="10B981"/>
+            </a:solidFill>
+          </a:ln>
+        </p:spPr>
+        <p:style>
+          <a:lnRef idx="1">
+            <a:schemeClr val="accent1"/>
+          </a:lnRef>
+          <a:fillRef idx="3">
+            <a:schemeClr val="accent1"/>
+          </a:fillRef>
+          <a:effectRef idx="2">
+            <a:schemeClr val="accent1"/>
+          </a:effectRef>
+          <a:fontRef idx="minor">
+            <a:schemeClr val="lt1"/>
+          </a:fontRef>
+        </p:style>
+        <p:txBody>
+          <a:bodyPr rtlCol="0" anchor="ctr" wrap="square"/>
+          <a:lstStyle/>
+          <a:p>
+            <a:pPr algn="ctr">
+              <a:defRPr sz="1100" b="1">
+                <a:solidFill>
+                  <a:srgbClr val="10B981"/>
+                </a:solidFill>
+                <a:latin typeface="Segoe UI"/>
+              </a:defRPr>
+            </a:pPr>
+            <a:r>
+              <a:t>Saubere Gehwege  •  Zufriedene Bürger  •  Effiziente Stadtreinigung</a:t>
+            </a:r>
+          </a:p>
+          <a:p>
+            <a:pPr algn="ctr">
+              <a:spcBef>
+                <a:spcPts val="300"/>
+              </a:spcBef>
+              <a:defRPr sz="950">
+                <a:solidFill>
+                  <a:srgbClr val="64748B"/>
+                </a:solidFill>
+                <a:latin typeface="Segoe UI"/>
+              </a:defRPr>
+            </a:pPr>
+            <a:r>
+              <a:t>Daneben! Intelligente Müllerkennung &amp; Bürger-Nudging</a:t>
+            </a:r>
+          </a:p>
+        </p:txBody>
+      </p:sp>
+      <p:sp>
+        <p:nvSpPr>
+          <p:cNvPr id="9" name="TextBox 8"/>
+          <p:cNvSpPr txBox="1"/>
+          <p:nvPr/>
+        </p:nvSpPr>
+        <p:spPr>
+          <a:xfrm>
+            <a:off x="731520" y="6537960"/>
+            <a:ext cx="10698480" cy="274320"/>
+          </a:xfrm>
+          <a:prstGeom prst="rect">
+            <a:avLst/>
+          </a:prstGeom>
+          <a:noFill/>
+        </p:spPr>
+        <p:txBody>
+          <a:bodyPr wrap="none">
+            <a:spAutoFit/>
+          </a:bodyPr>
+          <a:lstStyle/>
+          <a:p>
+            <a:pPr>
+              <a:defRPr sz="950">
+                <a:solidFill>
+                  <a:srgbClr val="64748B"/>
+                </a:solidFill>
+                <a:latin typeface="Segoe UI"/>
+              </a:defRPr>
+            </a:pPr>
+            <a:r>
+              <a:t>DANEBEN!  |  Produktions-Präsentation &amp; Sales Pitch (Standard-Edition)  |  Folie 9 von 9</a:t>
             </a:r>
           </a:p>
         </p:txBody>
